--- a/curriculum_plans/원광보건고_오리엔테이션_PPT.pptx
+++ b/curriculum_plans/원광보건고_오리엔테이션_PPT.pptx
@@ -3322,7 +3322,7 @@
                 <a:ea typeface="Calibri" pitchFamily="34" charset="-122"/>
                 <a:cs typeface="Calibri" pitchFamily="34" charset="-120"/>
               </a:rPr>
-              <a:t>사전 공지</a:t>
+              <a:t>사전 공지(논술과 동시 공지)</a:t>
             </a:r>
             <a:endParaRPr lang="en-US" sz="1100" dirty="0"/>
           </a:p>
@@ -3361,7 +3361,7 @@
                 <a:ea typeface="Cambria" pitchFamily="34" charset="-122"/>
                 <a:cs typeface="Cambria" pitchFamily="34" charset="-120"/>
               </a:rPr>
-              <a:t>11.20.</a:t>
+              <a:t>10.15.</a:t>
             </a:r>
             <a:endParaRPr lang="en-US" sz="2000" dirty="0"/>
           </a:p>
@@ -3422,7 +3422,7 @@
                 <a:ea typeface="Calibri" pitchFamily="34" charset="-122"/>
                 <a:cs typeface="Calibri" pitchFamily="34" charset="-120"/>
               </a:rPr>
-              <a:t>구술면접 실시일</a:t>
+              <a:t>구술면접 실시일(11월 말)</a:t>
             </a:r>
             <a:endParaRPr lang="en-US" sz="1100" dirty="0"/>
           </a:p>
@@ -3461,7 +3461,7 @@
                 <a:ea typeface="Cambria" pitchFamily="34" charset="-122"/>
                 <a:cs typeface="Cambria" pitchFamily="34" charset="-120"/>
               </a:rPr>
-              <a:t>12.4.(금)</a:t>
+              <a:t>11.27.(금)</a:t>
             </a:r>
             <a:endParaRPr lang="en-US" sz="2600" dirty="0"/>
           </a:p>
@@ -5276,7 +5276,7 @@
                 <a:ea typeface="Calibri" pitchFamily="34" charset="-122"/>
                 <a:cs typeface="Calibri" pitchFamily="34" charset="-120"/>
               </a:rPr>
-              <a:t>11.13.(금) 논술 실시</a:t>
+              <a:t>11.6.(금) 논술 실시</a:t>
             </a:r>
             <a:endParaRPr lang="en-US" sz="1300" dirty="0"/>
           </a:p>
@@ -5445,7 +5445,7 @@
                 <a:ea typeface="Calibri" pitchFamily="34" charset="-122"/>
                 <a:cs typeface="Calibri" pitchFamily="34" charset="-120"/>
               </a:rPr>
-              <a:t>12.4.(금) 구술면접 실시</a:t>
+              <a:t>11.27.(금) 구술면접 실시</a:t>
             </a:r>
             <a:endParaRPr lang="en-US" sz="1300" dirty="0"/>
           </a:p>
@@ -8285,7 +8285,7 @@
                 <a:ea typeface="Calibri" pitchFamily="34" charset="-122"/>
                 <a:cs typeface="Calibri" pitchFamily="34" charset="-120"/>
               </a:rPr>
-              <a:t>(11.13. 실시)</a:t>
+              <a:t>(11.6. 실시)</a:t>
             </a:r>
             <a:endParaRPr lang="en-US" sz="1300" dirty="0"/>
           </a:p>
@@ -8580,7 +8580,7 @@
                 <a:ea typeface="Calibri" pitchFamily="34" charset="-122"/>
                 <a:cs typeface="Calibri" pitchFamily="34" charset="-120"/>
               </a:rPr>
-              <a:t>(12.4. 실시)</a:t>
+              <a:t>(11.27. 실시)</a:t>
             </a:r>
             <a:endParaRPr lang="en-US" sz="1300" dirty="0"/>
           </a:p>
@@ -14975,7 +14975,7 @@
                 <a:ea typeface="Calibri" pitchFamily="34" charset="-122"/>
                 <a:cs typeface="Calibri" pitchFamily="34" charset="-120"/>
               </a:rPr>
-              <a:t>사전 공지</a:t>
+              <a:t>사전 공지(구술면접과 동시 공지)</a:t>
             </a:r>
             <a:endParaRPr lang="en-US" sz="1100" dirty="0"/>
           </a:p>
@@ -15014,7 +15014,7 @@
                 <a:ea typeface="Cambria" pitchFamily="34" charset="-122"/>
                 <a:cs typeface="Cambria" pitchFamily="34" charset="-120"/>
               </a:rPr>
-              <a:t>10.30.</a:t>
+              <a:t>10.15.</a:t>
             </a:r>
             <a:endParaRPr lang="en-US" sz="2200" dirty="0"/>
           </a:p>
@@ -15075,7 +15075,7 @@
                 <a:ea typeface="Calibri" pitchFamily="34" charset="-122"/>
                 <a:cs typeface="Calibri" pitchFamily="34" charset="-120"/>
               </a:rPr>
-              <a:t>논술 실시일</a:t>
+              <a:t>논술 실시일(11월 초)</a:t>
             </a:r>
             <a:endParaRPr lang="en-US" sz="1100" dirty="0"/>
           </a:p>
@@ -15114,7 +15114,7 @@
                 <a:ea typeface="Cambria" pitchFamily="34" charset="-122"/>
                 <a:cs typeface="Cambria" pitchFamily="34" charset="-120"/>
               </a:rPr>
-              <a:t>11.13.(금)</a:t>
+              <a:t>11.6.(금)</a:t>
             </a:r>
             <a:endParaRPr lang="en-US" sz="2600" dirty="0"/>
           </a:p>
